--- a/Project-Claw-DSTA-Deck.pptx
+++ b/Project-Claw-DSTA-Deck.pptx
@@ -10,6 +10,7 @@
     <p:sldId id="258" r:id="rId9"/>
     <p:sldId id="259" r:id="rId10"/>
     <p:sldId id="260" r:id="rId11"/>
+    <p:sldId id="266" r:id="rId17"/>
     <p:sldId id="261" r:id="rId12"/>
     <p:sldId id="262" r:id="rId13"/>
     <p:sldId id="263" r:id="rId14"/>
@@ -3869,7 +3870,804 @@
               </a:defRPr>
             </a:pPr>
             <a:r>
-              <a:t>10</a:t>
+              <a:t>11</a:t>
+            </a:r>
+          </a:p>
+        </p:txBody>
+      </p:sp>
+    </p:spTree>
+  </p:cSld>
+  <p:clrMapOvr>
+    <a:masterClrMapping/>
+  </p:clrMapOvr>
+</p:sld>
+</file>
+
+<file path=ppt/slides/slide11.xml><?xml version="1.0" encoding="utf-8"?>
+<p:sld xmlns:a="http://schemas.openxmlformats.org/drawingml/2006/main" xmlns:p="http://schemas.openxmlformats.org/presentationml/2006/main" xmlns:r="http://schemas.openxmlformats.org/officeDocument/2006/relationships">
+  <p:cSld>
+    <p:bg>
+      <p:bgPr>
+        <a:solidFill>
+          <a:srgbClr val="0A0E17"/>
+        </a:solidFill>
+        <a:effectLst/>
+      </p:bgPr>
+    </p:bg>
+    <p:spTree>
+      <p:nvGrpSpPr>
+        <p:cNvPr id="1" name=""/>
+        <p:cNvGrpSpPr/>
+        <p:nvPr/>
+      </p:nvGrpSpPr>
+      <p:grpSpPr/>
+      <p:sp>
+        <p:nvSpPr>
+          <p:cNvPr id="2" name="TextBox 1"/>
+          <p:cNvSpPr txBox="1"/>
+          <p:nvPr/>
+        </p:nvSpPr>
+        <p:spPr>
+          <a:xfrm>
+            <a:off x="731520" y="457200"/>
+            <a:ext cx="5486400" cy="365760"/>
+          </a:xfrm>
+          <a:prstGeom prst="rect">
+            <a:avLst/>
+          </a:prstGeom>
+          <a:noFill/>
+        </p:spPr>
+        <p:txBody>
+          <a:bodyPr wrap="square">
+            <a:spAutoFit/>
+          </a:bodyPr>
+          <a:lstStyle/>
+          <a:p>
+            <a:pPr algn="l">
+              <a:defRPr sz="1100" b="1">
+                <a:solidFill>
+                  <a:srgbClr val="3B82F6"/>
+                </a:solidFill>
+                <a:latin typeface="Calibri"/>
+              </a:defRPr>
+            </a:pPr>
+            <a:r>
+              <a:t>PURPOSE &amp; BENEFITS</a:t>
+            </a:r>
+          </a:p>
+        </p:txBody>
+      </p:sp>
+      <p:sp>
+        <p:nvSpPr>
+          <p:cNvPr id="3" name="TextBox 2"/>
+          <p:cNvSpPr txBox="1"/>
+          <p:nvPr/>
+        </p:nvSpPr>
+        <p:spPr>
+          <a:xfrm>
+            <a:off x="731520" y="914400"/>
+            <a:ext cx="10058400" cy="640080"/>
+          </a:xfrm>
+          <a:prstGeom prst="rect">
+            <a:avLst/>
+          </a:prstGeom>
+          <a:noFill/>
+        </p:spPr>
+        <p:txBody>
+          <a:bodyPr wrap="square">
+            <a:spAutoFit/>
+          </a:bodyPr>
+          <a:lstStyle/>
+          <a:p>
+            <a:pPr algn="l">
+              <a:defRPr sz="3600" b="1">
+                <a:solidFill>
+                  <a:srgbClr val="FFFFFF"/>
+                </a:solidFill>
+                <a:latin typeface="Calibri"/>
+              </a:defRPr>
+            </a:pPr>
+            <a:r>
+              <a:t>Why We Need This Claw</a:t>
+            </a:r>
+          </a:p>
+        </p:txBody>
+      </p:sp>
+      <p:sp>
+        <p:nvSpPr>
+          <p:cNvPr id="4" name="TextBox 3"/>
+          <p:cNvSpPr txBox="1"/>
+          <p:nvPr/>
+        </p:nvSpPr>
+        <p:spPr>
+          <a:xfrm>
+            <a:off x="731520" y="1645920"/>
+            <a:ext cx="10058400" cy="457200"/>
+          </a:xfrm>
+          <a:prstGeom prst="rect">
+            <a:avLst/>
+          </a:prstGeom>
+          <a:noFill/>
+        </p:spPr>
+        <p:txBody>
+          <a:bodyPr wrap="square">
+            <a:spAutoFit/>
+          </a:bodyPr>
+          <a:lstStyle/>
+          <a:p>
+            <a:pPr algn="l">
+              <a:defRPr sz="1500" b="0">
+                <a:solidFill>
+                  <a:srgbClr val="94A3B8"/>
+                </a:solidFill>
+                <a:latin typeface="Calibri"/>
+              </a:defRPr>
+            </a:pPr>
+            <a:r>
+              <a:t>The Claw exists to solve a specific operational problem — and delivers measurable benefits to every stakeholder in the project ecosystem.</a:t>
+            </a:r>
+          </a:p>
+        </p:txBody>
+      </p:sp>
+      <p:sp>
+        <p:nvSpPr>
+          <p:cNvPr id="5" name="Rounded Rectangle 4"/>
+          <p:cNvSpPr/>
+          <p:nvPr/>
+        </p:nvSpPr>
+        <p:spPr>
+          <a:xfrm>
+            <a:off x="731520" y="2377440"/>
+            <a:ext cx="3383280" cy="3291840"/>
+          </a:xfrm>
+          <a:prstGeom prst="roundRect">
+            <a:avLst/>
+          </a:prstGeom>
+          <a:solidFill>
+            <a:srgbClr val="111827"/>
+          </a:solidFill>
+          <a:ln w="12700">
+            <a:solidFill>
+              <a:srgbClr val="1E293B"/>
+            </a:solidFill>
+          </a:ln>
+        </p:spPr>
+        <p:style>
+          <a:lnRef idx="1">
+            <a:schemeClr val="accent1"/>
+          </a:lnRef>
+          <a:fillRef idx="3">
+            <a:schemeClr val="accent1"/>
+          </a:fillRef>
+          <a:effectRef idx="2">
+            <a:schemeClr val="accent1"/>
+          </a:effectRef>
+          <a:fontRef idx="minor">
+            <a:schemeClr val="lt1"/>
+          </a:fontRef>
+        </p:style>
+        <p:txBody>
+          <a:bodyPr rtlCol="0" anchor="ctr" wrap="square"/>
+          <a:lstStyle/>
+          <a:p>
+            <a:pPr algn="ctr">
+              <a:defRPr sz="1600" b="1">
+                <a:solidFill>
+                  <a:srgbClr val="E0E6F0"/>
+                </a:solidFill>
+                <a:latin typeface="Calibri"/>
+              </a:defRPr>
+            </a:pPr>
+            <a:r>
+              <a:t>🎯  For Project Leads</a:t>
+            </a:r>
+          </a:p>
+          <a:p>
+            <a:pPr>
+              <a:spcBef>
+                <a:spcPts val="200"/>
+              </a:spcBef>
+              <a:defRPr sz="1100">
+                <a:solidFill>
+                  <a:srgbClr val="94A3B8"/>
+                </a:solidFill>
+                <a:latin typeface="Calibri"/>
+              </a:defRPr>
+            </a:pPr>
+            <a:r>
+              <a:t>Real-time visibility into project status, task progress, and bottlenecks</a:t>
+            </a:r>
+          </a:p>
+          <a:p>
+            <a:pPr>
+              <a:spcBef>
+                <a:spcPts val="200"/>
+              </a:spcBef>
+              <a:defRPr sz="1100">
+                <a:solidFill>
+                  <a:srgbClr val="94A3B8"/>
+                </a:solidFill>
+                <a:latin typeface="Calibri"/>
+              </a:defRPr>
+            </a:pPr>
+          </a:p>
+          <a:p>
+            <a:pPr>
+              <a:spcBef>
+                <a:spcPts val="200"/>
+              </a:spcBef>
+              <a:defRPr sz="1100">
+                <a:solidFill>
+                  <a:srgbClr val="94A3B8"/>
+                </a:solidFill>
+                <a:latin typeface="Calibri"/>
+              </a:defRPr>
+            </a:pPr>
+            <a:r>
+              <a:t>No more digging through chat logs to find the one critical update</a:t>
+            </a:r>
+          </a:p>
+          <a:p>
+            <a:pPr>
+              <a:spcBef>
+                <a:spcPts val="200"/>
+              </a:spcBef>
+              <a:defRPr sz="1100">
+                <a:solidFill>
+                  <a:srgbClr val="94A3B8"/>
+                </a:solidFill>
+                <a:latin typeface="Calibri"/>
+              </a:defRPr>
+            </a:pPr>
+          </a:p>
+          <a:p>
+            <a:pPr>
+              <a:spcBef>
+                <a:spcPts val="200"/>
+              </a:spcBef>
+              <a:defRPr sz="1100">
+                <a:solidFill>
+                  <a:srgbClr val="94A3B8"/>
+                </a:solidFill>
+                <a:latin typeface="Calibri"/>
+              </a:defRPr>
+            </a:pPr>
+            <a:r>
+              <a:t>Know exactly what's urgent and what can wait</a:t>
+            </a:r>
+          </a:p>
+        </p:txBody>
+      </p:sp>
+      <p:sp>
+        <p:nvSpPr>
+          <p:cNvPr id="6" name="Rounded Rectangle 5"/>
+          <p:cNvSpPr/>
+          <p:nvPr/>
+        </p:nvSpPr>
+        <p:spPr>
+          <a:xfrm>
+            <a:off x="4480559" y="2377440"/>
+            <a:ext cx="3383280" cy="3291840"/>
+          </a:xfrm>
+          <a:prstGeom prst="roundRect">
+            <a:avLst/>
+          </a:prstGeom>
+          <a:solidFill>
+            <a:srgbClr val="111827"/>
+          </a:solidFill>
+          <a:ln w="12700">
+            <a:solidFill>
+              <a:srgbClr val="1E293B"/>
+            </a:solidFill>
+          </a:ln>
+        </p:spPr>
+        <p:style>
+          <a:lnRef idx="1">
+            <a:schemeClr val="accent1"/>
+          </a:lnRef>
+          <a:fillRef idx="3">
+            <a:schemeClr val="accent1"/>
+          </a:fillRef>
+          <a:effectRef idx="2">
+            <a:schemeClr val="accent1"/>
+          </a:effectRef>
+          <a:fontRef idx="minor">
+            <a:schemeClr val="lt1"/>
+          </a:fontRef>
+        </p:style>
+        <p:txBody>
+          <a:bodyPr rtlCol="0" anchor="ctr" wrap="square"/>
+          <a:lstStyle/>
+          <a:p>
+            <a:pPr algn="ctr">
+              <a:defRPr sz="1600" b="1">
+                <a:solidFill>
+                  <a:srgbClr val="E0E6F0"/>
+                </a:solidFill>
+                <a:latin typeface="Calibri"/>
+              </a:defRPr>
+            </a:pPr>
+            <a:r>
+              <a:t>🏛️  For Executive Committees</a:t>
+            </a:r>
+          </a:p>
+          <a:p>
+            <a:pPr>
+              <a:spcBef>
+                <a:spcPts val="200"/>
+              </a:spcBef>
+              <a:defRPr sz="1100">
+                <a:solidFill>
+                  <a:srgbClr val="94A3B8"/>
+                </a:solidFill>
+                <a:latin typeface="Calibri"/>
+              </a:defRPr>
+            </a:pPr>
+            <a:r>
+              <a:t>Compressed, accurate briefs instead of noisy information dumps</a:t>
+            </a:r>
+          </a:p>
+          <a:p>
+            <a:pPr>
+              <a:spcBef>
+                <a:spcPts val="200"/>
+              </a:spcBef>
+              <a:defRPr sz="1100">
+                <a:solidFill>
+                  <a:srgbClr val="94A3B8"/>
+                </a:solidFill>
+                <a:latin typeface="Calibri"/>
+              </a:defRPr>
+            </a:pPr>
+          </a:p>
+          <a:p>
+            <a:pPr>
+              <a:spcBef>
+                <a:spcPts val="200"/>
+              </a:spcBef>
+              <a:defRPr sz="1100">
+                <a:solidFill>
+                  <a:srgbClr val="94A3B8"/>
+                </a:solidFill>
+                <a:latin typeface="Calibri"/>
+              </a:defRPr>
+            </a:pPr>
+            <a:r>
+              <a:t>Confidence-marked assessments (not AI guessing as fact)</a:t>
+            </a:r>
+          </a:p>
+          <a:p>
+            <a:pPr>
+              <a:spcBef>
+                <a:spcPts val="200"/>
+              </a:spcBef>
+              <a:defRPr sz="1100">
+                <a:solidFill>
+                  <a:srgbClr val="94A3B8"/>
+                </a:solidFill>
+                <a:latin typeface="Calibri"/>
+              </a:defRPr>
+            </a:pPr>
+          </a:p>
+          <a:p>
+            <a:pPr>
+              <a:spcBef>
+                <a:spcPts val="200"/>
+              </a:spcBef>
+              <a:defRPr sz="1100">
+                <a:solidFill>
+                  <a:srgbClr val="94A3B8"/>
+                </a:solidFill>
+                <a:latin typeface="Calibri"/>
+              </a:defRPr>
+            </a:pPr>
+            <a:r>
+              <a:t>Escalation path for truly critical items</a:t>
+            </a:r>
+          </a:p>
+        </p:txBody>
+      </p:sp>
+      <p:sp>
+        <p:nvSpPr>
+          <p:cNvPr id="7" name="Rounded Rectangle 6"/>
+          <p:cNvSpPr/>
+          <p:nvPr/>
+        </p:nvSpPr>
+        <p:spPr>
+          <a:xfrm>
+            <a:off x="8229600" y="2377440"/>
+            <a:ext cx="3383280" cy="3291840"/>
+          </a:xfrm>
+          <a:prstGeom prst="roundRect">
+            <a:avLst/>
+          </a:prstGeom>
+          <a:solidFill>
+            <a:srgbClr val="111827"/>
+          </a:solidFill>
+          <a:ln w="12700">
+            <a:solidFill>
+              <a:srgbClr val="1E293B"/>
+            </a:solidFill>
+          </a:ln>
+        </p:spPr>
+        <p:style>
+          <a:lnRef idx="1">
+            <a:schemeClr val="accent1"/>
+          </a:lnRef>
+          <a:fillRef idx="3">
+            <a:schemeClr val="accent1"/>
+          </a:fillRef>
+          <a:effectRef idx="2">
+            <a:schemeClr val="accent1"/>
+          </a:effectRef>
+          <a:fontRef idx="minor">
+            <a:schemeClr val="lt1"/>
+          </a:fontRef>
+        </p:style>
+        <p:txBody>
+          <a:bodyPr rtlCol="0" anchor="ctr" wrap="square"/>
+          <a:lstStyle/>
+          <a:p>
+            <a:pPr algn="ctr">
+              <a:defRPr sz="1600" b="1">
+                <a:solidFill>
+                  <a:srgbClr val="E0E6F0"/>
+                </a:solidFill>
+                <a:latin typeface="Calibri"/>
+              </a:defRPr>
+            </a:pPr>
+            <a:r>
+              <a:t>🛡️  For Defence &amp; Security</a:t>
+            </a:r>
+          </a:p>
+          <a:p>
+            <a:pPr>
+              <a:spcBef>
+                <a:spcPts val="200"/>
+              </a:spcBef>
+              <a:defRPr sz="1100">
+                <a:solidFill>
+                  <a:srgbClr val="94A3B8"/>
+                </a:solidFill>
+                <a:latin typeface="Calibri"/>
+              </a:defRPr>
+            </a:pPr>
+            <a:r>
+              <a:t>Breach monitoring and cyber hygiene integrated into daily ops</a:t>
+            </a:r>
+          </a:p>
+          <a:p>
+            <a:pPr>
+              <a:spcBef>
+                <a:spcPts val="200"/>
+              </a:spcBef>
+              <a:defRPr sz="1100">
+                <a:solidFill>
+                  <a:srgbClr val="94A3B8"/>
+                </a:solidFill>
+                <a:latin typeface="Calibri"/>
+              </a:defRPr>
+            </a:pPr>
+          </a:p>
+          <a:p>
+            <a:pPr>
+              <a:spcBef>
+                <a:spcPts val="200"/>
+              </a:spcBef>
+              <a:defRPr sz="1100">
+                <a:solidFill>
+                  <a:srgbClr val="94A3B8"/>
+                </a:solidFill>
+                <a:latin typeface="Calibri"/>
+              </a:defRPr>
+            </a:pPr>
+            <a:r>
+              <a:t>Misinformation / fact-check capability for decision confidence</a:t>
+            </a:r>
+          </a:p>
+          <a:p>
+            <a:pPr>
+              <a:spcBef>
+                <a:spcPts val="200"/>
+              </a:spcBef>
+              <a:defRPr sz="1100">
+                <a:solidFill>
+                  <a:srgbClr val="94A3B8"/>
+                </a:solidFill>
+                <a:latin typeface="Calibri"/>
+              </a:defRPr>
+            </a:pPr>
+          </a:p>
+          <a:p>
+            <a:pPr>
+              <a:spcBef>
+                <a:spcPts val="200"/>
+              </a:spcBef>
+              <a:defRPr sz="1100">
+                <a:solidFill>
+                  <a:srgbClr val="94A3B8"/>
+                </a:solidFill>
+                <a:latin typeface="Calibri"/>
+              </a:defRPr>
+            </a:pPr>
+            <a:r>
+              <a:t>OPSEC-aware — no data exfiltration, principal-controlled access</a:t>
+            </a:r>
+          </a:p>
+        </p:txBody>
+      </p:sp>
+      <p:sp>
+        <p:nvSpPr>
+          <p:cNvPr id="8" name="TextBox 7"/>
+          <p:cNvSpPr txBox="1"/>
+          <p:nvPr/>
+        </p:nvSpPr>
+        <p:spPr>
+          <a:xfrm>
+            <a:off x="731520" y="5852160"/>
+            <a:ext cx="10058400" cy="274320"/>
+          </a:xfrm>
+          <a:prstGeom prst="rect">
+            <a:avLst/>
+          </a:prstGeom>
+          <a:noFill/>
+        </p:spPr>
+        <p:txBody>
+          <a:bodyPr wrap="square">
+            <a:spAutoFit/>
+          </a:bodyPr>
+          <a:lstStyle/>
+          <a:p>
+            <a:pPr algn="l">
+              <a:defRPr sz="1200" b="1">
+                <a:solidFill>
+                  <a:srgbClr val="64748B"/>
+                </a:solidFill>
+                <a:latin typeface="Calibri"/>
+              </a:defRPr>
+            </a:pPr>
+            <a:r>
+              <a:t>Three core outcomes:</a:t>
+            </a:r>
+          </a:p>
+        </p:txBody>
+      </p:sp>
+      <p:sp>
+        <p:nvSpPr>
+          <p:cNvPr id="9" name="Rounded Rectangle 8"/>
+          <p:cNvSpPr/>
+          <p:nvPr/>
+        </p:nvSpPr>
+        <p:spPr>
+          <a:xfrm>
+            <a:off x="1828800" y="6126480"/>
+            <a:ext cx="2743200" cy="640080"/>
+          </a:xfrm>
+          <a:prstGeom prst="roundRect">
+            <a:avLst/>
+          </a:prstGeom>
+          <a:solidFill>
+            <a:srgbClr val="111827"/>
+          </a:solidFill>
+          <a:ln w="12700">
+            <a:solidFill>
+              <a:srgbClr val="1E293B"/>
+            </a:solidFill>
+          </a:ln>
+        </p:spPr>
+        <p:style>
+          <a:lnRef idx="1">
+            <a:schemeClr val="accent1"/>
+          </a:lnRef>
+          <a:fillRef idx="3">
+            <a:schemeClr val="accent1"/>
+          </a:fillRef>
+          <a:effectRef idx="2">
+            <a:schemeClr val="accent1"/>
+          </a:effectRef>
+          <a:fontRef idx="minor">
+            <a:schemeClr val="lt1"/>
+          </a:fontRef>
+        </p:style>
+        <p:txBody>
+          <a:bodyPr rtlCol="0" anchor="ctr" wrap="square"/>
+          <a:lstStyle/>
+          <a:p>
+            <a:pPr algn="ctr">
+              <a:defRPr sz="1000" b="1">
+                <a:solidFill>
+                  <a:srgbClr val="06B6D4"/>
+                </a:solidFill>
+                <a:latin typeface="Calibri"/>
+              </a:defRPr>
+            </a:pPr>
+            <a:r>
+              <a:t>⚡  FASTER DECISIONS</a:t>
+            </a:r>
+          </a:p>
+          <a:p>
+            <a:pPr algn="ctr">
+              <a:defRPr sz="900">
+                <a:solidFill>
+                  <a:srgbClr val="64748B"/>
+                </a:solidFill>
+                <a:latin typeface="Calibri"/>
+              </a:defRPr>
+            </a:pPr>
+            <a:r>
+              <a:t>Information compressed into actionable briefs</a:t>
+            </a:r>
+          </a:p>
+        </p:txBody>
+      </p:sp>
+      <p:sp>
+        <p:nvSpPr>
+          <p:cNvPr id="10" name="Rounded Rectangle 9"/>
+          <p:cNvSpPr/>
+          <p:nvPr/>
+        </p:nvSpPr>
+        <p:spPr>
+          <a:xfrm>
+            <a:off x="5029200" y="6126480"/>
+            <a:ext cx="2743200" cy="640080"/>
+          </a:xfrm>
+          <a:prstGeom prst="roundRect">
+            <a:avLst/>
+          </a:prstGeom>
+          <a:solidFill>
+            <a:srgbClr val="111827"/>
+          </a:solidFill>
+          <a:ln w="12700">
+            <a:solidFill>
+              <a:srgbClr val="1E293B"/>
+            </a:solidFill>
+          </a:ln>
+        </p:spPr>
+        <p:style>
+          <a:lnRef idx="1">
+            <a:schemeClr val="accent1"/>
+          </a:lnRef>
+          <a:fillRef idx="3">
+            <a:schemeClr val="accent1"/>
+          </a:fillRef>
+          <a:effectRef idx="2">
+            <a:schemeClr val="accent1"/>
+          </a:effectRef>
+          <a:fontRef idx="minor">
+            <a:schemeClr val="lt1"/>
+          </a:fontRef>
+        </p:style>
+        <p:txBody>
+          <a:bodyPr rtlCol="0" anchor="ctr" wrap="square"/>
+          <a:lstStyle/>
+          <a:p>
+            <a:pPr algn="ctr">
+              <a:defRPr sz="1000" b="1">
+                <a:solidFill>
+                  <a:srgbClr val="06B6D4"/>
+                </a:solidFill>
+                <a:latin typeface="Calibri"/>
+              </a:defRPr>
+            </a:pPr>
+            <a:r>
+              <a:t>🎯  FEWER SURPRISES</a:t>
+            </a:r>
+          </a:p>
+          <a:p>
+            <a:pPr algn="ctr">
+              <a:defRPr sz="900">
+                <a:solidFill>
+                  <a:srgbClr val="64748B"/>
+                </a:solidFill>
+                <a:latin typeface="Calibri"/>
+              </a:defRPr>
+            </a:pPr>
+            <a:r>
+              <a:t>Urgent items surfaced before they become crises</a:t>
+            </a:r>
+          </a:p>
+        </p:txBody>
+      </p:sp>
+      <p:sp>
+        <p:nvSpPr>
+          <p:cNvPr id="11" name="Rounded Rectangle 10"/>
+          <p:cNvSpPr/>
+          <p:nvPr/>
+        </p:nvSpPr>
+        <p:spPr>
+          <a:xfrm>
+            <a:off x="8229600" y="6126480"/>
+            <a:ext cx="2743200" cy="640080"/>
+          </a:xfrm>
+          <a:prstGeom prst="roundRect">
+            <a:avLst/>
+          </a:prstGeom>
+          <a:solidFill>
+            <a:srgbClr val="111827"/>
+          </a:solidFill>
+          <a:ln w="12700">
+            <a:solidFill>
+              <a:srgbClr val="1E293B"/>
+            </a:solidFill>
+          </a:ln>
+        </p:spPr>
+        <p:style>
+          <a:lnRef idx="1">
+            <a:schemeClr val="accent1"/>
+          </a:lnRef>
+          <a:fillRef idx="3">
+            <a:schemeClr val="accent1"/>
+          </a:fillRef>
+          <a:effectRef idx="2">
+            <a:schemeClr val="accent1"/>
+          </a:effectRef>
+          <a:fontRef idx="minor">
+            <a:schemeClr val="lt1"/>
+          </a:fontRef>
+        </p:style>
+        <p:txBody>
+          <a:bodyPr rtlCol="0" anchor="ctr" wrap="square"/>
+          <a:lstStyle/>
+          <a:p>
+            <a:pPr algn="ctr">
+              <a:defRPr sz="1000" b="1">
+                <a:solidFill>
+                  <a:srgbClr val="06B6D4"/>
+                </a:solidFill>
+                <a:latin typeface="Calibri"/>
+              </a:defRPr>
+            </a:pPr>
+            <a:r>
+              <a:t>📊  BETTER OVERSIGHT</a:t>
+            </a:r>
+          </a:p>
+          <a:p>
+            <a:pPr algn="ctr">
+              <a:defRPr sz="900">
+                <a:solidFill>
+                  <a:srgbClr val="64748B"/>
+                </a:solidFill>
+                <a:latin typeface="Calibri"/>
+              </a:defRPr>
+            </a:pPr>
+            <a:r>
+              <a:t>One interface for status, tasks, logistics, alerts</a:t>
+            </a:r>
+          </a:p>
+        </p:txBody>
+      </p:sp>
+      <p:sp>
+        <p:nvSpPr>
+          <p:cNvPr id="12" name="TextBox 11"/>
+          <p:cNvSpPr txBox="1"/>
+          <p:nvPr/>
+        </p:nvSpPr>
+        <p:spPr>
+          <a:xfrm>
+            <a:off x="11155680" y="6400800"/>
+            <a:ext cx="914400" cy="365760"/>
+          </a:xfrm>
+          <a:prstGeom prst="rect">
+            <a:avLst/>
+          </a:prstGeom>
+          <a:noFill/>
+        </p:spPr>
+        <p:txBody>
+          <a:bodyPr wrap="square">
+            <a:spAutoFit/>
+          </a:bodyPr>
+          <a:lstStyle/>
+          <a:p>
+            <a:pPr algn="r">
+              <a:defRPr sz="1100" b="0">
+                <a:solidFill>
+                  <a:srgbClr val="64748B"/>
+                </a:solidFill>
+                <a:latin typeface="Calibri"/>
+              </a:defRPr>
+            </a:pPr>
+            <a:r>
+              <a:t>06</a:t>
             </a:r>
           </a:p>
         </p:txBody>
@@ -8822,7 +9620,7 @@
               </a:defRPr>
             </a:pPr>
             <a:r>
-              <a:t>06</a:t>
+              <a:t>07</a:t>
             </a:r>
           </a:p>
         </p:txBody>
@@ -9311,7 +10109,7 @@
               </a:defRPr>
             </a:pPr>
             <a:r>
-              <a:t>07</a:t>
+              <a:t>08</a:t>
             </a:r>
           </a:p>
         </p:txBody>
@@ -10024,7 +10822,7 @@
               </a:defRPr>
             </a:pPr>
             <a:r>
-              <a:t>08</a:t>
+              <a:t>09</a:t>
             </a:r>
           </a:p>
         </p:txBody>
@@ -10923,7 +11721,7 @@
               </a:defRPr>
             </a:pPr>
             <a:r>
-              <a:t>09</a:t>
+              <a:t>10</a:t>
             </a:r>
           </a:p>
         </p:txBody>
